--- a/docs/경쟁기술_인텔리전스_구조_V6.pptx
+++ b/docs/경쟁기술_인텔리전스_구조_V6.pptx
@@ -3581,7 +3581,7 @@
                 </a:solidFill>
                 <a:latin typeface="맑은 고딕"/>
               </a:rPr>
-              <a:t>2만 2,452 건</a:t>
+              <a:t>5만 2,482 건</a:t>
             </a:r>
           </a:p>
         </p:txBody>
@@ -3620,7 +3620,7 @@
                 </a:solidFill>
                 <a:latin typeface="맑은 고딕"/>
               </a:rPr>
-              <a:t>특허 4만 1,665건의 국가별 중복 제거분</a:t>
+              <a:t>특허 16만 5,650건 국가별 중복 제거</a:t>
             </a:r>
           </a:p>
         </p:txBody>
@@ -3788,7 +3788,7 @@
                 </a:solidFill>
                 <a:latin typeface="맑은 고딕"/>
               </a:rPr>
-              <a:t>1만 1,060 건</a:t>
+              <a:t>3만 5,562 건</a:t>
             </a:r>
           </a:p>
         </p:txBody>
@@ -3995,7 +3995,7 @@
                 </a:solidFill>
                 <a:latin typeface="맑은 고딕"/>
               </a:rPr>
-              <a:t>54 / 57 개</a:t>
+              <a:t>55 / 57 개</a:t>
             </a:r>
           </a:p>
         </p:txBody>
@@ -4163,7 +4163,7 @@
                 </a:solidFill>
                 <a:latin typeface="맑은 고딕"/>
               </a:rPr>
-              <a:t>⑤ 완성도</a:t>
+              <a:t>⑤ 신뢰도 '상'</a:t>
             </a:r>
           </a:p>
         </p:txBody>
@@ -4202,7 +4202,7 @@
                 </a:solidFill>
                 <a:latin typeface="맑은 고딕"/>
               </a:rPr>
-              <a:t>약 80 %</a:t>
+              <a:t>10 개 기술</a:t>
             </a:r>
           </a:p>
         </p:txBody>
@@ -4241,7 +4241,7 @@
                 </a:solidFill>
                 <a:latin typeface="맑은 고딕"/>
               </a:rPr>
-              <a:t>창구 6곳 연결 완료</a:t>
+              <a:t>이종 2축 교차 검증 성립분</a:t>
             </a:r>
           </a:p>
         </p:txBody>
@@ -4448,7 +4448,7 @@
                 </a:solidFill>
                 <a:latin typeface="맑은 고딕"/>
               </a:rPr>
-              <a:t>특허 1만 5,990 · 공시 79</a:t>
+              <a:t>특허 48,138 · 공시 79</a:t>
             </a:r>
           </a:p>
         </p:txBody>
@@ -4487,7 +4487,7 @@
                 </a:solidFill>
                 <a:latin typeface="맑은 고딕"/>
               </a:rPr>
-              <a:t>1만 6,069</a:t>
+              <a:t>4만 8,217</a:t>
             </a:r>
           </a:p>
         </p:txBody>
@@ -4736,7 +4736,7 @@
                 </a:solidFill>
                 <a:latin typeface="맑은 고딕"/>
               </a:rPr>
-              <a:t>특허 9,826 · 설비투자 공시 27</a:t>
+              <a:t>특허 34,649 · 설비투자 공시 27</a:t>
             </a:r>
           </a:p>
         </p:txBody>
@@ -4775,7 +4775,7 @@
                 </a:solidFill>
                 <a:latin typeface="맑은 고딕"/>
               </a:rPr>
-              <a:t>9,853</a:t>
+              <a:t>3만 4,676</a:t>
             </a:r>
           </a:p>
         </p:txBody>
@@ -4833,7 +4833,7 @@
         <p:spPr>
           <a:xfrm>
             <a:off x="4956048" y="3058668"/>
-            <a:ext cx="401604" cy="77724"/>
+            <a:ext cx="467441" cy="77724"/>
           </a:xfrm>
           <a:prstGeom prst="rect">
             <a:avLst/>
@@ -4902,7 +4902,7 @@
                 </a:solidFill>
                 <a:latin typeface="맑은 고딕"/>
               </a:rPr>
-              <a:t>61%</a:t>
+              <a:t>71%</a:t>
             </a:r>
           </a:p>
         </p:txBody>
@@ -5024,7 +5024,7 @@
                 </a:solidFill>
                 <a:latin typeface="맑은 고딕"/>
               </a:rPr>
-              <a:t>특허 6,717 · 공시 82</a:t>
+              <a:t>특허 32,450 · 공시 82</a:t>
             </a:r>
           </a:p>
         </p:txBody>
@@ -5063,7 +5063,7 @@
                 </a:solidFill>
                 <a:latin typeface="맑은 고딕"/>
               </a:rPr>
-              <a:t>6,799</a:t>
+              <a:t>3만 2,532</a:t>
             </a:r>
           </a:p>
         </p:txBody>
@@ -5121,7 +5121,7 @@
         <p:spPr>
           <a:xfrm>
             <a:off x="4956048" y="3355848"/>
-            <a:ext cx="276514" cy="77724"/>
+            <a:ext cx="441106" cy="77724"/>
           </a:xfrm>
           <a:prstGeom prst="rect">
             <a:avLst/>
@@ -5190,7 +5190,7 @@
                 </a:solidFill>
                 <a:latin typeface="맑은 고딕"/>
               </a:rPr>
-              <a:t>42%</a:t>
+              <a:t>67%</a:t>
             </a:r>
           </a:p>
         </p:txBody>
@@ -5312,7 +5312,7 @@
                 </a:solidFill>
                 <a:latin typeface="맑은 고딕"/>
               </a:rPr>
-              <a:t>특허 2,991 · 공시 1 — EDINET 미연결</a:t>
+              <a:t>특허 25,907 · EDINET 미연결</a:t>
             </a:r>
           </a:p>
         </p:txBody>
@@ -5351,7 +5351,7 @@
                 </a:solidFill>
                 <a:latin typeface="맑은 고딕"/>
               </a:rPr>
-              <a:t>2,992</a:t>
+              <a:t>2만 5,908</a:t>
             </a:r>
           </a:p>
         </p:txBody>
@@ -5409,7 +5409,7 @@
         <p:spPr>
           <a:xfrm>
             <a:off x="4956048" y="3653028"/>
-            <a:ext cx="125089" cy="77724"/>
+            <a:ext cx="348935" cy="77724"/>
           </a:xfrm>
           <a:prstGeom prst="rect">
             <a:avLst/>
@@ -5478,7 +5478,7 @@
                 </a:solidFill>
                 <a:latin typeface="맑은 고딕"/>
               </a:rPr>
-              <a:t>19%</a:t>
+              <a:t>53%</a:t>
             </a:r>
           </a:p>
         </p:txBody>
@@ -5492,6 +5492,294 @@
         <p:spPr>
           <a:xfrm>
             <a:off x="530352" y="3963924"/>
+            <a:ext cx="68580" cy="68580"/>
+          </a:xfrm>
+          <a:prstGeom prst="rect">
+            <a:avLst/>
+          </a:prstGeom>
+          <a:solidFill>
+            <a:srgbClr val="B9821A"/>
+          </a:solidFill>
+          <a:ln>
+            <a:noFill/>
+          </a:ln>
+          <a:effectLst/>
+        </p:spPr>
+        <p:style>
+          <a:lnRef idx="1">
+            <a:schemeClr val="accent1"/>
+          </a:lnRef>
+          <a:fillRef idx="3">
+            <a:schemeClr val="accent1"/>
+          </a:fillRef>
+          <a:effectRef idx="2">
+            <a:schemeClr val="accent1"/>
+          </a:effectRef>
+          <a:fontRef idx="minor">
+            <a:schemeClr val="lt1"/>
+          </a:fontRef>
+        </p:style>
+        <p:txBody>
+          <a:bodyPr rtlCol="0" anchor="ctr" wrap="square"/>
+          <a:lstStyle/>
+          <a:p>
+            <a:pPr algn="ctr"/>
+          </a:p>
+        </p:txBody>
+      </p:sp>
+      <p:sp>
+        <p:nvSpPr>
+          <p:cNvPr id="61" name="TextBox 60"/>
+          <p:cNvSpPr txBox="1"/>
+          <p:nvPr/>
+        </p:nvSpPr>
+        <p:spPr>
+          <a:xfrm>
+            <a:off x="658368" y="3886200"/>
+            <a:ext cx="1051560" cy="182880"/>
+          </a:xfrm>
+          <a:prstGeom prst="rect">
+            <a:avLst/>
+          </a:prstGeom>
+          <a:noFill/>
+        </p:spPr>
+        <p:txBody>
+          <a:bodyPr wrap="square" lIns="0" rIns="0" tIns="0" bIns="0" anchor="t">
+            <a:spAutoFit/>
+          </a:bodyPr>
+          <a:lstStyle/>
+          <a:p>
+            <a:pPr algn="l">
+              <a:spcAft>
+                <a:spcPts val="0"/>
+              </a:spcAft>
+            </a:pPr>
+            <a:r>
+              <a:rPr sz="1000" b="1">
+                <a:solidFill>
+                  <a:srgbClr val="14181C"/>
+                </a:solidFill>
+                <a:latin typeface="맑은 고딕"/>
+              </a:rPr>
+              <a:t>BYD</a:t>
+            </a:r>
+          </a:p>
+        </p:txBody>
+      </p:sp>
+      <p:sp>
+        <p:nvSpPr>
+          <p:cNvPr id="62" name="TextBox 61"/>
+          <p:cNvSpPr txBox="1"/>
+          <p:nvPr/>
+        </p:nvSpPr>
+        <p:spPr>
+          <a:xfrm>
+            <a:off x="1755648" y="3895344"/>
+            <a:ext cx="2240280" cy="182880"/>
+          </a:xfrm>
+          <a:prstGeom prst="rect">
+            <a:avLst/>
+          </a:prstGeom>
+          <a:noFill/>
+        </p:spPr>
+        <p:txBody>
+          <a:bodyPr wrap="square" lIns="0" rIns="0" tIns="0" bIns="0" anchor="t">
+            <a:spAutoFit/>
+          </a:bodyPr>
+          <a:lstStyle/>
+          <a:p>
+            <a:pPr algn="l">
+              <a:spcAft>
+                <a:spcPts val="0"/>
+              </a:spcAft>
+            </a:pPr>
+            <a:r>
+              <a:rPr sz="800" b="0">
+                <a:solidFill>
+                  <a:srgbClr val="79838C"/>
+                </a:solidFill>
+                <a:latin typeface="맑은 고딕"/>
+              </a:rPr>
+              <a:t>특허 10,614 · 설비투자 원천 부재 확인</a:t>
+            </a:r>
+          </a:p>
+        </p:txBody>
+      </p:sp>
+      <p:sp>
+        <p:nvSpPr>
+          <p:cNvPr id="63" name="TextBox 62"/>
+          <p:cNvSpPr txBox="1"/>
+          <p:nvPr/>
+        </p:nvSpPr>
+        <p:spPr>
+          <a:xfrm>
+            <a:off x="4023360" y="3886200"/>
+            <a:ext cx="868680" cy="182880"/>
+          </a:xfrm>
+          <a:prstGeom prst="rect">
+            <a:avLst/>
+          </a:prstGeom>
+          <a:noFill/>
+        </p:spPr>
+        <p:txBody>
+          <a:bodyPr wrap="square" lIns="0" rIns="0" tIns="0" bIns="0" anchor="t">
+            <a:spAutoFit/>
+          </a:bodyPr>
+          <a:lstStyle/>
+          <a:p>
+            <a:pPr algn="r">
+              <a:spcAft>
+                <a:spcPts val="0"/>
+              </a:spcAft>
+            </a:pPr>
+            <a:r>
+              <a:rPr sz="950" b="1">
+                <a:solidFill>
+                  <a:srgbClr val="14181C"/>
+                </a:solidFill>
+                <a:latin typeface="맑은 고딕"/>
+              </a:rPr>
+              <a:t>1만 621</a:t>
+            </a:r>
+          </a:p>
+        </p:txBody>
+      </p:sp>
+      <p:sp>
+        <p:nvSpPr>
+          <p:cNvPr id="64" name="Rectangle 63"/>
+          <p:cNvSpPr/>
+          <p:nvPr/>
+        </p:nvSpPr>
+        <p:spPr>
+          <a:xfrm>
+            <a:off x="4956048" y="3950208"/>
+            <a:ext cx="658368" cy="77724"/>
+          </a:xfrm>
+          <a:prstGeom prst="rect">
+            <a:avLst/>
+          </a:prstGeom>
+          <a:solidFill>
+            <a:srgbClr val="EDF0F1"/>
+          </a:solidFill>
+          <a:ln>
+            <a:noFill/>
+          </a:ln>
+          <a:effectLst/>
+        </p:spPr>
+        <p:style>
+          <a:lnRef idx="1">
+            <a:schemeClr val="accent1"/>
+          </a:lnRef>
+          <a:fillRef idx="3">
+            <a:schemeClr val="accent1"/>
+          </a:fillRef>
+          <a:effectRef idx="2">
+            <a:schemeClr val="accent1"/>
+          </a:effectRef>
+          <a:fontRef idx="minor">
+            <a:schemeClr val="lt1"/>
+          </a:fontRef>
+        </p:style>
+        <p:txBody>
+          <a:bodyPr rtlCol="0" anchor="ctr" wrap="square"/>
+          <a:lstStyle/>
+          <a:p>
+            <a:pPr algn="ctr"/>
+          </a:p>
+        </p:txBody>
+      </p:sp>
+      <p:sp>
+        <p:nvSpPr>
+          <p:cNvPr id="65" name="Rectangle 64"/>
+          <p:cNvSpPr/>
+          <p:nvPr/>
+        </p:nvSpPr>
+        <p:spPr>
+          <a:xfrm>
+            <a:off x="4956048" y="3950208"/>
+            <a:ext cx="144840" cy="77724"/>
+          </a:xfrm>
+          <a:prstGeom prst="rect">
+            <a:avLst/>
+          </a:prstGeom>
+          <a:solidFill>
+            <a:srgbClr val="B9821A"/>
+          </a:solidFill>
+          <a:ln>
+            <a:noFill/>
+          </a:ln>
+          <a:effectLst/>
+        </p:spPr>
+        <p:style>
+          <a:lnRef idx="1">
+            <a:schemeClr val="accent1"/>
+          </a:lnRef>
+          <a:fillRef idx="3">
+            <a:schemeClr val="accent1"/>
+          </a:fillRef>
+          <a:effectRef idx="2">
+            <a:schemeClr val="accent1"/>
+          </a:effectRef>
+          <a:fontRef idx="minor">
+            <a:schemeClr val="lt1"/>
+          </a:fontRef>
+        </p:style>
+        <p:txBody>
+          <a:bodyPr rtlCol="0" anchor="ctr" wrap="square"/>
+          <a:lstStyle/>
+          <a:p>
+            <a:pPr algn="ctr"/>
+          </a:p>
+        </p:txBody>
+      </p:sp>
+      <p:sp>
+        <p:nvSpPr>
+          <p:cNvPr id="66" name="TextBox 65"/>
+          <p:cNvSpPr txBox="1"/>
+          <p:nvPr/>
+        </p:nvSpPr>
+        <p:spPr>
+          <a:xfrm>
+            <a:off x="5650992" y="3886200"/>
+            <a:ext cx="301752" cy="182880"/>
+          </a:xfrm>
+          <a:prstGeom prst="rect">
+            <a:avLst/>
+          </a:prstGeom>
+          <a:noFill/>
+        </p:spPr>
+        <p:txBody>
+          <a:bodyPr wrap="square" lIns="0" rIns="0" tIns="0" bIns="0" anchor="t">
+            <a:spAutoFit/>
+          </a:bodyPr>
+          <a:lstStyle/>
+          <a:p>
+            <a:pPr algn="r">
+              <a:spcAft>
+                <a:spcPts val="0"/>
+              </a:spcAft>
+            </a:pPr>
+            <a:r>
+              <a:rPr sz="900" b="1">
+                <a:solidFill>
+                  <a:srgbClr val="414A52"/>
+                </a:solidFill>
+                <a:latin typeface="맑은 고딕"/>
+              </a:rPr>
+              <a:t>22%</a:t>
+            </a:r>
+          </a:p>
+        </p:txBody>
+      </p:sp>
+      <p:sp>
+        <p:nvSpPr>
+          <p:cNvPr id="67" name="Rectangle 66"/>
+          <p:cNvSpPr/>
+          <p:nvPr/>
+        </p:nvSpPr>
+        <p:spPr>
+          <a:xfrm>
+            <a:off x="530352" y="4261104"/>
             <a:ext cx="68580" cy="68580"/>
           </a:xfrm>
           <a:prstGeom prst="rect">
@@ -5529,13 +5817,13 @@
       </p:sp>
       <p:sp>
         <p:nvSpPr>
-          <p:cNvPr id="61" name="TextBox 60"/>
-          <p:cNvSpPr txBox="1"/>
-          <p:nvPr/>
-        </p:nvSpPr>
-        <p:spPr>
-          <a:xfrm>
-            <a:off x="658368" y="3886200"/>
+          <p:cNvPr id="68" name="TextBox 67"/>
+          <p:cNvSpPr txBox="1"/>
+          <p:nvPr/>
+        </p:nvSpPr>
+        <p:spPr>
+          <a:xfrm>
+            <a:off x="658368" y="4183380"/>
             <a:ext cx="1051560" cy="182880"/>
           </a:xfrm>
           <a:prstGeom prst="rect">
@@ -5568,13 +5856,13 @@
       </p:sp>
       <p:sp>
         <p:nvSpPr>
-          <p:cNvPr id="62" name="TextBox 61"/>
-          <p:cNvSpPr txBox="1"/>
-          <p:nvPr/>
-        </p:nvSpPr>
-        <p:spPr>
-          <a:xfrm>
-            <a:off x="1755648" y="3895344"/>
+          <p:cNvPr id="69" name="TextBox 68"/>
+          <p:cNvSpPr txBox="1"/>
+          <p:nvPr/>
+        </p:nvSpPr>
+        <p:spPr>
+          <a:xfrm>
+            <a:off x="1755648" y="4192524"/>
             <a:ext cx="2240280" cy="182880"/>
           </a:xfrm>
           <a:prstGeom prst="rect">
@@ -5600,20 +5888,20 @@
                 </a:solidFill>
                 <a:latin typeface="맑은 고딕"/>
               </a:rPr>
-              <a:t>특허 2,261 · 공시 62</a:t>
-            </a:r>
-          </a:p>
-        </p:txBody>
-      </p:sp>
-      <p:sp>
-        <p:nvSpPr>
-          <p:cNvPr id="63" name="TextBox 62"/>
-          <p:cNvSpPr txBox="1"/>
-          <p:nvPr/>
-        </p:nvSpPr>
-        <p:spPr>
-          <a:xfrm>
-            <a:off x="4023360" y="3886200"/>
+              <a:t>특허 9,283 · 공시 62</a:t>
+            </a:r>
+          </a:p>
+        </p:txBody>
+      </p:sp>
+      <p:sp>
+        <p:nvSpPr>
+          <p:cNvPr id="70" name="TextBox 69"/>
+          <p:cNvSpPr txBox="1"/>
+          <p:nvPr/>
+        </p:nvSpPr>
+        <p:spPr>
+          <a:xfrm>
+            <a:off x="4023360" y="4183380"/>
             <a:ext cx="868680" cy="182880"/>
           </a:xfrm>
           <a:prstGeom prst="rect">
@@ -5639,20 +5927,20 @@
                 </a:solidFill>
                 <a:latin typeface="맑은 고딕"/>
               </a:rPr>
-              <a:t>2,323</a:t>
-            </a:r>
-          </a:p>
-        </p:txBody>
-      </p:sp>
-      <p:sp>
-        <p:nvSpPr>
-          <p:cNvPr id="64" name="Rectangle 63"/>
+              <a:t>9,345</a:t>
+            </a:r>
+          </a:p>
+        </p:txBody>
+      </p:sp>
+      <p:sp>
+        <p:nvSpPr>
+          <p:cNvPr id="71" name="Rectangle 70"/>
           <p:cNvSpPr/>
           <p:nvPr/>
         </p:nvSpPr>
         <p:spPr>
           <a:xfrm>
-            <a:off x="4956048" y="3950208"/>
+            <a:off x="4956048" y="4247388"/>
             <a:ext cx="658368" cy="77724"/>
           </a:xfrm>
           <a:prstGeom prst="rect">
@@ -5690,14 +5978,14 @@
       </p:sp>
       <p:sp>
         <p:nvSpPr>
-          <p:cNvPr id="65" name="Rectangle 64"/>
+          <p:cNvPr id="72" name="Rectangle 71"/>
           <p:cNvSpPr/>
           <p:nvPr/>
         </p:nvSpPr>
         <p:spPr>
           <a:xfrm>
-            <a:off x="4956048" y="3950208"/>
-            <a:ext cx="92171" cy="77724"/>
+            <a:off x="4956048" y="4247388"/>
+            <a:ext cx="125089" cy="77724"/>
           </a:xfrm>
           <a:prstGeom prst="rect">
             <a:avLst/>
@@ -5734,13 +6022,13 @@
       </p:sp>
       <p:sp>
         <p:nvSpPr>
-          <p:cNvPr id="66" name="TextBox 65"/>
-          <p:cNvSpPr txBox="1"/>
-          <p:nvPr/>
-        </p:nvSpPr>
-        <p:spPr>
-          <a:xfrm>
-            <a:off x="5650992" y="3886200"/>
+          <p:cNvPr id="73" name="TextBox 72"/>
+          <p:cNvSpPr txBox="1"/>
+          <p:nvPr/>
+        </p:nvSpPr>
+        <p:spPr>
+          <a:xfrm>
+            <a:off x="5650992" y="4183380"/>
             <a:ext cx="301752" cy="182880"/>
           </a:xfrm>
           <a:prstGeom prst="rect">
@@ -5766,20 +6054,20 @@
                 </a:solidFill>
                 <a:latin typeface="맑은 고딕"/>
               </a:rPr>
-              <a:t>14%</a:t>
-            </a:r>
-          </a:p>
-        </p:txBody>
-      </p:sp>
-      <p:sp>
-        <p:nvSpPr>
-          <p:cNvPr id="67" name="Rectangle 66"/>
+              <a:t>19%</a:t>
+            </a:r>
+          </a:p>
+        </p:txBody>
+      </p:sp>
+      <p:sp>
+        <p:nvSpPr>
+          <p:cNvPr id="74" name="Rectangle 73"/>
           <p:cNvSpPr/>
           <p:nvPr/>
         </p:nvSpPr>
         <p:spPr>
           <a:xfrm>
-            <a:off x="530352" y="4261104"/>
+            <a:off x="530352" y="4558284"/>
             <a:ext cx="68580" cy="68580"/>
           </a:xfrm>
           <a:prstGeom prst="rect">
@@ -5817,13 +6105,13 @@
       </p:sp>
       <p:sp>
         <p:nvSpPr>
-          <p:cNvPr id="68" name="TextBox 67"/>
-          <p:cNvSpPr txBox="1"/>
-          <p:nvPr/>
-        </p:nvSpPr>
-        <p:spPr>
-          <a:xfrm>
-            <a:off x="658368" y="4183380"/>
+          <p:cNvPr id="75" name="TextBox 74"/>
+          <p:cNvSpPr txBox="1"/>
+          <p:nvPr/>
+        </p:nvSpPr>
+        <p:spPr>
+          <a:xfrm>
+            <a:off x="658368" y="4480560"/>
             <a:ext cx="1051560" cy="182880"/>
           </a:xfrm>
           <a:prstGeom prst="rect">
@@ -5849,20 +6137,20 @@
                 </a:solidFill>
                 <a:latin typeface="맑은 고딕"/>
               </a:rPr>
-              <a:t>BYD</a:t>
-            </a:r>
-          </a:p>
-        </p:txBody>
-      </p:sp>
-      <p:sp>
-        <p:nvSpPr>
-          <p:cNvPr id="69" name="TextBox 68"/>
-          <p:cNvSpPr txBox="1"/>
-          <p:nvPr/>
-        </p:nvSpPr>
-        <p:spPr>
-          <a:xfrm>
-            <a:off x="1755648" y="4192524"/>
+              <a:t>테슬라</a:t>
+            </a:r>
+          </a:p>
+        </p:txBody>
+      </p:sp>
+      <p:sp>
+        <p:nvSpPr>
+          <p:cNvPr id="76" name="TextBox 75"/>
+          <p:cNvSpPr txBox="1"/>
+          <p:nvPr/>
+        </p:nvSpPr>
+        <p:spPr>
+          <a:xfrm>
+            <a:off x="1755648" y="4489704"/>
             <a:ext cx="2240280" cy="182880"/>
           </a:xfrm>
           <a:prstGeom prst="rect">
@@ -5888,20 +6176,20 @@
                 </a:solidFill>
                 <a:latin typeface="맑은 고딕"/>
               </a:rPr>
-              <a:t>특허 2,215 · 설비투자 원천 부재 확인</a:t>
-            </a:r>
-          </a:p>
-        </p:txBody>
-      </p:sp>
-      <p:sp>
-        <p:nvSpPr>
-          <p:cNvPr id="70" name="TextBox 69"/>
-          <p:cNvSpPr txBox="1"/>
-          <p:nvPr/>
-        </p:nvSpPr>
-        <p:spPr>
-          <a:xfrm>
-            <a:off x="4023360" y="4183380"/>
+              <a:t>특허 1,276 · SEC 본문검색 연결</a:t>
+            </a:r>
+          </a:p>
+        </p:txBody>
+      </p:sp>
+      <p:sp>
+        <p:nvSpPr>
+          <p:cNvPr id="77" name="TextBox 76"/>
+          <p:cNvSpPr txBox="1"/>
+          <p:nvPr/>
+        </p:nvSpPr>
+        <p:spPr>
+          <a:xfrm>
+            <a:off x="4023360" y="4480560"/>
             <a:ext cx="868680" cy="182880"/>
           </a:xfrm>
           <a:prstGeom prst="rect">
@@ -5927,20 +6215,20 @@
                 </a:solidFill>
                 <a:latin typeface="맑은 고딕"/>
               </a:rPr>
-              <a:t>2,222</a:t>
-            </a:r>
-          </a:p>
-        </p:txBody>
-      </p:sp>
-      <p:sp>
-        <p:nvSpPr>
-          <p:cNvPr id="71" name="Rectangle 70"/>
+              <a:t>1,276</a:t>
+            </a:r>
+          </a:p>
+        </p:txBody>
+      </p:sp>
+      <p:sp>
+        <p:nvSpPr>
+          <p:cNvPr id="78" name="Rectangle 77"/>
           <p:cNvSpPr/>
           <p:nvPr/>
         </p:nvSpPr>
         <p:spPr>
           <a:xfrm>
-            <a:off x="4956048" y="4247388"/>
+            <a:off x="4956048" y="4544568"/>
             <a:ext cx="658368" cy="77724"/>
           </a:xfrm>
           <a:prstGeom prst="rect">
@@ -5978,14 +6266,14 @@
       </p:sp>
       <p:sp>
         <p:nvSpPr>
-          <p:cNvPr id="72" name="Rectangle 71"/>
+          <p:cNvPr id="79" name="Rectangle 78"/>
           <p:cNvSpPr/>
           <p:nvPr/>
         </p:nvSpPr>
         <p:spPr>
           <a:xfrm>
-            <a:off x="4956048" y="4247388"/>
-            <a:ext cx="92171" cy="77724"/>
+            <a:off x="4956048" y="4544568"/>
+            <a:ext cx="13167" cy="77724"/>
           </a:xfrm>
           <a:prstGeom prst="rect">
             <a:avLst/>
@@ -6022,294 +6310,6 @@
       </p:sp>
       <p:sp>
         <p:nvSpPr>
-          <p:cNvPr id="73" name="TextBox 72"/>
-          <p:cNvSpPr txBox="1"/>
-          <p:nvPr/>
-        </p:nvSpPr>
-        <p:spPr>
-          <a:xfrm>
-            <a:off x="5650992" y="4183380"/>
-            <a:ext cx="301752" cy="182880"/>
-          </a:xfrm>
-          <a:prstGeom prst="rect">
-            <a:avLst/>
-          </a:prstGeom>
-          <a:noFill/>
-        </p:spPr>
-        <p:txBody>
-          <a:bodyPr wrap="square" lIns="0" rIns="0" tIns="0" bIns="0" anchor="t">
-            <a:spAutoFit/>
-          </a:bodyPr>
-          <a:lstStyle/>
-          <a:p>
-            <a:pPr algn="r">
-              <a:spcAft>
-                <a:spcPts val="0"/>
-              </a:spcAft>
-            </a:pPr>
-            <a:r>
-              <a:rPr sz="900" b="1">
-                <a:solidFill>
-                  <a:srgbClr val="414A52"/>
-                </a:solidFill>
-                <a:latin typeface="맑은 고딕"/>
-              </a:rPr>
-              <a:t>14%</a:t>
-            </a:r>
-          </a:p>
-        </p:txBody>
-      </p:sp>
-      <p:sp>
-        <p:nvSpPr>
-          <p:cNvPr id="74" name="Rectangle 73"/>
-          <p:cNvSpPr/>
-          <p:nvPr/>
-        </p:nvSpPr>
-        <p:spPr>
-          <a:xfrm>
-            <a:off x="530352" y="4558284"/>
-            <a:ext cx="68580" cy="68580"/>
-          </a:xfrm>
-          <a:prstGeom prst="rect">
-            <a:avLst/>
-          </a:prstGeom>
-          <a:solidFill>
-            <a:srgbClr val="B9821A"/>
-          </a:solidFill>
-          <a:ln>
-            <a:noFill/>
-          </a:ln>
-          <a:effectLst/>
-        </p:spPr>
-        <p:style>
-          <a:lnRef idx="1">
-            <a:schemeClr val="accent1"/>
-          </a:lnRef>
-          <a:fillRef idx="3">
-            <a:schemeClr val="accent1"/>
-          </a:fillRef>
-          <a:effectRef idx="2">
-            <a:schemeClr val="accent1"/>
-          </a:effectRef>
-          <a:fontRef idx="minor">
-            <a:schemeClr val="lt1"/>
-          </a:fontRef>
-        </p:style>
-        <p:txBody>
-          <a:bodyPr rtlCol="0" anchor="ctr" wrap="square"/>
-          <a:lstStyle/>
-          <a:p>
-            <a:pPr algn="ctr"/>
-          </a:p>
-        </p:txBody>
-      </p:sp>
-      <p:sp>
-        <p:nvSpPr>
-          <p:cNvPr id="75" name="TextBox 74"/>
-          <p:cNvSpPr txBox="1"/>
-          <p:nvPr/>
-        </p:nvSpPr>
-        <p:spPr>
-          <a:xfrm>
-            <a:off x="658368" y="4480560"/>
-            <a:ext cx="1051560" cy="182880"/>
-          </a:xfrm>
-          <a:prstGeom prst="rect">
-            <a:avLst/>
-          </a:prstGeom>
-          <a:noFill/>
-        </p:spPr>
-        <p:txBody>
-          <a:bodyPr wrap="square" lIns="0" rIns="0" tIns="0" bIns="0" anchor="t">
-            <a:spAutoFit/>
-          </a:bodyPr>
-          <a:lstStyle/>
-          <a:p>
-            <a:pPr algn="l">
-              <a:spcAft>
-                <a:spcPts val="0"/>
-              </a:spcAft>
-            </a:pPr>
-            <a:r>
-              <a:rPr sz="1000" b="1">
-                <a:solidFill>
-                  <a:srgbClr val="14181C"/>
-                </a:solidFill>
-                <a:latin typeface="맑은 고딕"/>
-              </a:rPr>
-              <a:t>테슬라</a:t>
-            </a:r>
-          </a:p>
-        </p:txBody>
-      </p:sp>
-      <p:sp>
-        <p:nvSpPr>
-          <p:cNvPr id="76" name="TextBox 75"/>
-          <p:cNvSpPr txBox="1"/>
-          <p:nvPr/>
-        </p:nvSpPr>
-        <p:spPr>
-          <a:xfrm>
-            <a:off x="1755648" y="4489704"/>
-            <a:ext cx="2240280" cy="182880"/>
-          </a:xfrm>
-          <a:prstGeom prst="rect">
-            <a:avLst/>
-          </a:prstGeom>
-          <a:noFill/>
-        </p:spPr>
-        <p:txBody>
-          <a:bodyPr wrap="square" lIns="0" rIns="0" tIns="0" bIns="0" anchor="t">
-            <a:spAutoFit/>
-          </a:bodyPr>
-          <a:lstStyle/>
-          <a:p>
-            <a:pPr algn="l">
-              <a:spcAft>
-                <a:spcPts val="0"/>
-              </a:spcAft>
-            </a:pPr>
-            <a:r>
-              <a:rPr sz="800" b="0">
-                <a:solidFill>
-                  <a:srgbClr val="79838C"/>
-                </a:solidFill>
-                <a:latin typeface="맑은 고딕"/>
-              </a:rPr>
-              <a:t>특허 169 · SEC 본문검색 연결</a:t>
-            </a:r>
-          </a:p>
-        </p:txBody>
-      </p:sp>
-      <p:sp>
-        <p:nvSpPr>
-          <p:cNvPr id="77" name="TextBox 76"/>
-          <p:cNvSpPr txBox="1"/>
-          <p:nvPr/>
-        </p:nvSpPr>
-        <p:spPr>
-          <a:xfrm>
-            <a:off x="4023360" y="4480560"/>
-            <a:ext cx="868680" cy="182880"/>
-          </a:xfrm>
-          <a:prstGeom prst="rect">
-            <a:avLst/>
-          </a:prstGeom>
-          <a:noFill/>
-        </p:spPr>
-        <p:txBody>
-          <a:bodyPr wrap="square" lIns="0" rIns="0" tIns="0" bIns="0" anchor="t">
-            <a:spAutoFit/>
-          </a:bodyPr>
-          <a:lstStyle/>
-          <a:p>
-            <a:pPr algn="r">
-              <a:spcAft>
-                <a:spcPts val="0"/>
-              </a:spcAft>
-            </a:pPr>
-            <a:r>
-              <a:rPr sz="950" b="1">
-                <a:solidFill>
-                  <a:srgbClr val="14181C"/>
-                </a:solidFill>
-                <a:latin typeface="맑은 고딕"/>
-              </a:rPr>
-              <a:t>169</a:t>
-            </a:r>
-          </a:p>
-        </p:txBody>
-      </p:sp>
-      <p:sp>
-        <p:nvSpPr>
-          <p:cNvPr id="78" name="Rectangle 77"/>
-          <p:cNvSpPr/>
-          <p:nvPr/>
-        </p:nvSpPr>
-        <p:spPr>
-          <a:xfrm>
-            <a:off x="4956048" y="4544568"/>
-            <a:ext cx="658368" cy="77724"/>
-          </a:xfrm>
-          <a:prstGeom prst="rect">
-            <a:avLst/>
-          </a:prstGeom>
-          <a:solidFill>
-            <a:srgbClr val="EDF0F1"/>
-          </a:solidFill>
-          <a:ln>
-            <a:noFill/>
-          </a:ln>
-          <a:effectLst/>
-        </p:spPr>
-        <p:style>
-          <a:lnRef idx="1">
-            <a:schemeClr val="accent1"/>
-          </a:lnRef>
-          <a:fillRef idx="3">
-            <a:schemeClr val="accent1"/>
-          </a:fillRef>
-          <a:effectRef idx="2">
-            <a:schemeClr val="accent1"/>
-          </a:effectRef>
-          <a:fontRef idx="minor">
-            <a:schemeClr val="lt1"/>
-          </a:fontRef>
-        </p:style>
-        <p:txBody>
-          <a:bodyPr rtlCol="0" anchor="ctr" wrap="square"/>
-          <a:lstStyle/>
-          <a:p>
-            <a:pPr algn="ctr"/>
-          </a:p>
-        </p:txBody>
-      </p:sp>
-      <p:sp>
-        <p:nvSpPr>
-          <p:cNvPr id="79" name="Rectangle 78"/>
-          <p:cNvSpPr/>
-          <p:nvPr/>
-        </p:nvSpPr>
-        <p:spPr>
-          <a:xfrm>
-            <a:off x="4956048" y="4544568"/>
-            <a:ext cx="13167" cy="77724"/>
-          </a:xfrm>
-          <a:prstGeom prst="rect">
-            <a:avLst/>
-          </a:prstGeom>
-          <a:solidFill>
-            <a:srgbClr val="B9821A"/>
-          </a:solidFill>
-          <a:ln>
-            <a:noFill/>
-          </a:ln>
-          <a:effectLst/>
-        </p:spPr>
-        <p:style>
-          <a:lnRef idx="1">
-            <a:schemeClr val="accent1"/>
-          </a:lnRef>
-          <a:fillRef idx="3">
-            <a:schemeClr val="accent1"/>
-          </a:fillRef>
-          <a:effectRef idx="2">
-            <a:schemeClr val="accent1"/>
-          </a:effectRef>
-          <a:fontRef idx="minor">
-            <a:schemeClr val="lt1"/>
-          </a:fontRef>
-        </p:style>
-        <p:txBody>
-          <a:bodyPr rtlCol="0" anchor="ctr" wrap="square"/>
-          <a:lstStyle/>
-          <a:p>
-            <a:pPr algn="ctr"/>
-          </a:p>
-        </p:txBody>
-      </p:sp>
-      <p:sp>
-        <p:nvSpPr>
           <p:cNvPr id="80" name="TextBox 79"/>
           <p:cNvSpPr txBox="1"/>
           <p:nvPr/>
@@ -6503,7 +6503,7 @@
                 </a:solidFill>
                 <a:latin typeface="맑은 고딕"/>
               </a:rPr>
-              <a:t>4만 2,289</a:t>
+              <a:t>16만 2,575</a:t>
             </a:r>
           </a:p>
         </p:txBody>
@@ -6754,7 +6754,7 @@
                 </a:solidFill>
                 <a:latin typeface="맑은 고딕"/>
               </a:rPr>
-              <a:t>· 공정기술 57개 전량을 열위 16 · 동등 14 · 우위 20 으로 구분 제시함</a:t>
+              <a:t>· 공정기술 57개 전량을 열위 17 · 동등 15 · 우위 20 · 판정 불가 5 로 구분 제시함</a:t>
             </a:r>
           </a:p>
         </p:txBody>
@@ -7073,7 +7073,7 @@
                 </a:solidFill>
                 <a:latin typeface="맑은 고딕"/>
               </a:rPr>
-              <a:t>· 설비투자 공시가 공정기술 단위로 미배정 — 신뢰도 '상' 판정 0건 사유임</a:t>
+              <a:t>· 설비투자 공시는 공장 단위 정보로 전사 근거로만 반영함 — 기술 단위 배정 불가함</a:t>
             </a:r>
           </a:p>
         </p:txBody>
@@ -7319,7 +7319,7 @@
                 </a:solidFill>
                 <a:latin typeface="맑은 고딕"/>
               </a:rPr>
-              <a:t>패밀리 병합 4.2만→2.2만건.
+              <a:t>패밀리 병합 16만 5,650→5만 2,482건.
 보정 계수·듀얼 트랙 적용 완료.</a:t>
             </a:r>
           </a:p>
@@ -7425,7 +7425,7 @@
             <a:avLst/>
           </a:prstGeom>
           <a:solidFill>
-            <a:srgbClr val="B9821A"/>
+            <a:srgbClr val="2C6B52"/>
           </a:solidFill>
           <a:ln>
             <a:noFill/>
@@ -7488,7 +7488,7 @@
                 </a:solidFill>
                 <a:latin typeface="맑은 고딕"/>
               </a:rPr>
-              <a:t>1단계</a:t>
+              <a:t>완료</a:t>
             </a:r>
           </a:p>
         </p:txBody>
@@ -7527,7 +7527,7 @@
                 </a:solidFill>
                 <a:latin typeface="맑은 고딕"/>
               </a:rPr>
-              <a:t>자사 보유 현황 확정</a:t>
+              <a:t>데이터 확충 — 축 2 가동</a:t>
             </a:r>
           </a:p>
         </p:txBody>
@@ -7566,8 +7566,8 @@
                 </a:solidFill>
                 <a:latin typeface="맑은 고딕"/>
               </a:rPr>
-              <a:t>'미보유' 18건 재검증 추진.
-공정기술팀 확인 필요함.</a:t>
+              <a:t>관측 16년치·피인용 확보.
+신뢰도 '상' 10건 도출.</a:t>
             </a:r>
           </a:p>
         </p:txBody>
@@ -7602,11 +7602,11 @@
             <a:r>
               <a:rPr sz="900" b="1">
                 <a:solidFill>
-                  <a:srgbClr val="B9821A"/>
-                </a:solidFill>
-                <a:latin typeface="맑은 고딕"/>
-              </a:rPr>
-              <a:t>약 3일</a:t>
+                  <a:srgbClr val="2C6B52"/>
+                </a:solidFill>
+                <a:latin typeface="맑은 고딕"/>
+              </a:rPr>
+              <a:t>BQ 60.6GB(무료분)</a:t>
             </a:r>
           </a:p>
         </p:txBody>
@@ -7735,7 +7735,7 @@
                 </a:solidFill>
                 <a:latin typeface="맑은 고딕"/>
               </a:rPr>
-              <a:t>2단계</a:t>
+              <a:t>1단계</a:t>
             </a:r>
           </a:p>
         </p:txBody>
@@ -7774,7 +7774,7 @@
                 </a:solidFill>
                 <a:latin typeface="맑은 고딕"/>
               </a:rPr>
-              <a:t>공시 본문 확보 — 축 2 가동</a:t>
+              <a:t>자사 보유 현황 확정</a:t>
             </a:r>
           </a:p>
         </p:txBody>
@@ -7813,8 +7813,8 @@
                 </a:solidFill>
                 <a:latin typeface="맑은 고딕"/>
               </a:rPr>
-              <a:t>투자 규모·준공 시점 추출로
-신뢰도 '상' 판정 확보.</a:t>
+              <a:t>'미보유' 18건 재검증 추진.
+공정기술팀 확인 필요함.</a:t>
             </a:r>
           </a:p>
         </p:txBody>
@@ -7853,7 +7853,7 @@
                 </a:solidFill>
                 <a:latin typeface="맑은 고딕"/>
               </a:rPr>
-              <a:t>약 2일</a:t>
+              <a:t>약 3일</a:t>
             </a:r>
           </a:p>
         </p:txBody>
@@ -7982,7 +7982,7 @@
                 </a:solidFill>
                 <a:latin typeface="맑은 고딕"/>
               </a:rPr>
-              <a:t>3단계</a:t>
+              <a:t>2단계</a:t>
             </a:r>
           </a:p>
         </p:txBody>
@@ -8582,7 +8582,7 @@
               </a:rPr>
               <a:t>패밀리 병합 후 선점 시점 격차와
 품질 가중 출원량을 개월로 환산함.
-국가 수·등록 여부·최신성 반영함.</a:t>
+국가 수·등록·피인용 반영함.</a:t>
             </a:r>
           </a:p>
         </p:txBody>
@@ -8621,7 +8621,7 @@
                 </a:solidFill>
                 <a:latin typeface="맑은 고딕"/>
               </a:rPr>
-              <a:t>가동 중 · 50개 기술</a:t>
+              <a:t>가동 중 · 52개 기술</a:t>
             </a:r>
           </a:p>
         </p:txBody>
@@ -8687,7 +8687,7 @@
             <a:avLst/>
           </a:prstGeom>
           <a:solidFill>
-            <a:srgbClr val="B9821A"/>
+            <a:srgbClr val="2C6B52"/>
           </a:solidFill>
           <a:ln>
             <a:noFill/>
@@ -8755,7 +8755,7 @@
             <a:r>
               <a:rPr sz="900" b="1">
                 <a:solidFill>
-                  <a:srgbClr val="B9821A"/>
+                  <a:srgbClr val="2C6B52"/>
                 </a:solidFill>
                 <a:latin typeface="맑은 고딕"/>
               </a:rPr>
@@ -8874,11 +8874,11 @@
             <a:r>
               <a:rPr sz="900" b="1">
                 <a:solidFill>
-                  <a:srgbClr val="B9821A"/>
-                </a:solidFill>
-                <a:latin typeface="맑은 고딕"/>
-              </a:rPr>
-              <a:t>본문 확보 필요</a:t>
+                  <a:srgbClr val="2C6B52"/>
+                </a:solidFill>
+                <a:latin typeface="맑은 고딕"/>
+              </a:rPr>
+              <a:t>전사 근거로 가동 · 25개 기술</a:t>
             </a:r>
           </a:p>
         </p:txBody>
@@ -9665,7 +9665,7 @@
                 </a:solidFill>
                 <a:latin typeface="맑은 고딕"/>
               </a:rPr>
-              <a:t>3. 전 수치는 원문까지 역추적 가능하며, 근거 부족 건은 '판정 불가'로 분리 표기함. 현 신뢰도 '상' 판정 0건으로 확인 범위를 초과하여 주장하지 않음.</a:t>
+              <a:t>3. 전 수치는 원문까지 역추적 가능하며, 근거 부족 건은 '판정 불가'로 분리 표기함. 신뢰도 '상' 판정은 이종 2축 교차 검증이 성립한 10건에 한정하며, 확인 범위를 초과하여 주장하지 않음.</a:t>
             </a:r>
           </a:p>
         </p:txBody>

--- a/docs/경쟁기술_인텔리전스_구조_V6.pptx
+++ b/docs/경쟁기술_인텔리전스_구조_V6.pptx
@@ -3788,7 +3788,7 @@
                 </a:solidFill>
                 <a:latin typeface="맑은 고딕"/>
               </a:rPr>
-              <a:t>3만 5,562 건</a:t>
+              <a:t>4만 474 건</a:t>
             </a:r>
           </a:p>
         </p:txBody>
@@ -3995,7 +3995,7 @@
                 </a:solidFill>
                 <a:latin typeface="맑은 고딕"/>
               </a:rPr>
-              <a:t>55 / 57 개</a:t>
+              <a:t>71 / 73 개</a:t>
             </a:r>
           </a:p>
         </p:txBody>
@@ -4202,7 +4202,7 @@
                 </a:solidFill>
                 <a:latin typeface="맑은 고딕"/>
               </a:rPr>
-              <a:t>10 개 기술</a:t>
+              <a:t>17 개 기술</a:t>
             </a:r>
           </a:p>
         </p:txBody>
@@ -6754,7 +6754,7 @@
                 </a:solidFill>
                 <a:latin typeface="맑은 고딕"/>
               </a:rPr>
-              <a:t>· 공정기술 57개 전량을 열위 17 · 동등 15 · 우위 20 · 판정 불가 5 로 구분 제시함</a:t>
+              <a:t>· 공정기술 73개 전량을 열위 17 · 동등 15 · 우위 20 · 확인 필요 16 로 구분 제시함</a:t>
             </a:r>
           </a:p>
         </p:txBody>
@@ -6793,7 +6793,7 @@
                 </a:solidFill>
                 <a:latin typeface="맑은 고딕"/>
               </a:rPr>
-              <a:t>· 시급도 = 기술 격차 × 경쟁사 확산도 × 근거 확실성 — 보완 우선순위 도출</a:t>
+              <a:t>· 시급도 = 기술 격차 × 경쟁사 확산도 × 근거 확실성 — 27점 이상 검토 착수선 적용</a:t>
             </a:r>
           </a:p>
         </p:txBody>
@@ -7034,7 +7034,7 @@
                 </a:solidFill>
                 <a:latin typeface="맑은 고딕"/>
               </a:rPr>
-              <a:t>· 기존 '미보유' 18건 전량에서 자사 특허 검색됨 — 공정기술팀 재검증 필요함</a:t>
+              <a:t>· 기존 '미보유' 17건에서 자사 특허 검색됨 — 생산기술혁신센터 재검증 필요함</a:t>
             </a:r>
           </a:p>
         </p:txBody>
@@ -7567,7 +7567,7 @@
                 <a:latin typeface="맑은 고딕"/>
               </a:rPr>
               <a:t>관측 16년치·피인용 확보.
-신뢰도 '상' 10건 도출.</a:t>
+신뢰도 '상' 17건 도출.</a:t>
             </a:r>
           </a:p>
         </p:txBody>
@@ -7813,8 +7813,8 @@
                 </a:solidFill>
                 <a:latin typeface="맑은 고딕"/>
               </a:rPr>
-              <a:t>'미보유' 18건 재검증 추진.
-공정기술팀 확인 필요함.</a:t>
+              <a:t>재검증 17건 · 신규 편입 16건.
+생산기술혁신센터 확인 필요함.</a:t>
             </a:r>
           </a:p>
         </p:txBody>
@@ -8621,7 +8621,7 @@
                 </a:solidFill>
                 <a:latin typeface="맑은 고딕"/>
               </a:rPr>
-              <a:t>가동 중 · 52개 기술</a:t>
+              <a:t>가동 중 · 68개 기술</a:t>
             </a:r>
           </a:p>
         </p:txBody>
@@ -8878,7 +8878,7 @@
                 </a:solidFill>
                 <a:latin typeface="맑은 고딕"/>
               </a:rPr>
-              <a:t>전사 근거로 가동 · 25개 기술</a:t>
+              <a:t>전사 근거로 가동 · 32개 기술</a:t>
             </a:r>
           </a:p>
         </p:txBody>
@@ -9665,7 +9665,7 @@
                 </a:solidFill>
                 <a:latin typeface="맑은 고딕"/>
               </a:rPr>
-              <a:t>3. 전 수치는 원문까지 역추적 가능하며, 근거 부족 건은 '판정 불가'로 분리 표기함. 신뢰도 '상' 판정은 이종 2축 교차 검증이 성립한 10건에 한정하며, 확인 범위를 초과하여 주장하지 않음.</a:t>
+              <a:t>3. 전 수치는 원문까지 역추적 가능하며, 근거 부족 건은 '판정 불가'로 분리 표기함. 신뢰도 '상' 판정은 이종 2축 교차 검증이 성립한 17건에 한정하며, 확인 범위를 초과하여 주장하지 않음.</a:t>
             </a:r>
           </a:p>
         </p:txBody>

--- a/docs/경쟁기술_인텔리전스_구조_V6.pptx
+++ b/docs/경쟁기술_인텔리전스_구조_V6.pptx
@@ -6754,7 +6754,7 @@
                 </a:solidFill>
                 <a:latin typeface="맑은 고딕"/>
               </a:rPr>
-              <a:t>· 공정기술 73개 전량을 열위 17 · 동등 15 · 우위 20 · 확인 필요 16 로 구분 제시함</a:t>
+              <a:t>· 공정기술 73개 전량 = 열위 17 · 동등 15 · 우위 20 · 확인 필요 16 · 근거 부족 5</a:t>
             </a:r>
           </a:p>
         </p:txBody>
@@ -7073,7 +7073,7 @@
                 </a:solidFill>
                 <a:latin typeface="맑은 고딕"/>
               </a:rPr>
-              <a:t>· 설비투자 공시는 공장 단위 정보로 전사 근거로만 반영함 — 기술 단위 배정 불가함</a:t>
+              <a:t>· '확인 필요' 16건은 자사 현황 미확인분 · '근거 부족' 5건은 경쟁사 근거 미확보분 — 미확보 대상이 상호 반대임</a:t>
             </a:r>
           </a:p>
         </p:txBody>
